--- a/2018/11-Nov/ML.NET/v07-release-MLNET-Blog-Post-images/Working-Images.pptx
+++ b/2018/11-Nov/ML.NET/v07-release-MLNET-Blog-Post-images/Working-Images.pptx
@@ -107,6 +107,11 @@
       </a:defRPr>
     </a:lvl9pPr>
   </p:defaultTextStyle>
+  <p:extLst>
+    <p:ext uri="{EFAFB233-063F-42B5-8137-9DF3F51BA10A}">
+      <p15:sldGuideLst xmlns:p15="http://schemas.microsoft.com/office/powerpoint/2012/main"/>
+    </p:ext>
+  </p:extLst>
 </p:presentation>
 </file>
 
@@ -192,7 +197,7 @@
           <a:p>
             <a:fld id="{1F62B86B-602D-4807-A4C6-49A2D792B5FA}" type="datetimeFigureOut">
               <a:rPr lang="en-US" smtClean="0"/>
-              <a:t>11/5/2018</a:t>
+              <a:t>11/6/2018</a:t>
             </a:fld>
             <a:endParaRPr lang="en-US"/>
           </a:p>
@@ -690,7 +695,7 @@
           <a:p>
             <a:fld id="{4899E5CE-9E2F-4137-94E0-5AE06EE15E38}" type="datetimeFigureOut">
               <a:rPr lang="en-US" smtClean="0"/>
-              <a:t>11/5/2018</a:t>
+              <a:t>11/6/2018</a:t>
             </a:fld>
             <a:endParaRPr lang="en-US"/>
           </a:p>
@@ -888,7 +893,7 @@
           <a:p>
             <a:fld id="{4899E5CE-9E2F-4137-94E0-5AE06EE15E38}" type="datetimeFigureOut">
               <a:rPr lang="en-US" smtClean="0"/>
-              <a:t>11/5/2018</a:t>
+              <a:t>11/6/2018</a:t>
             </a:fld>
             <a:endParaRPr lang="en-US"/>
           </a:p>
@@ -1096,7 +1101,7 @@
           <a:p>
             <a:fld id="{4899E5CE-9E2F-4137-94E0-5AE06EE15E38}" type="datetimeFigureOut">
               <a:rPr lang="en-US" smtClean="0"/>
-              <a:t>11/5/2018</a:t>
+              <a:t>11/6/2018</a:t>
             </a:fld>
             <a:endParaRPr lang="en-US"/>
           </a:p>
@@ -1294,7 +1299,7 @@
           <a:p>
             <a:fld id="{4899E5CE-9E2F-4137-94E0-5AE06EE15E38}" type="datetimeFigureOut">
               <a:rPr lang="en-US" smtClean="0"/>
-              <a:t>11/5/2018</a:t>
+              <a:t>11/6/2018</a:t>
             </a:fld>
             <a:endParaRPr lang="en-US"/>
           </a:p>
@@ -1569,7 +1574,7 @@
           <a:p>
             <a:fld id="{4899E5CE-9E2F-4137-94E0-5AE06EE15E38}" type="datetimeFigureOut">
               <a:rPr lang="en-US" smtClean="0"/>
-              <a:t>11/5/2018</a:t>
+              <a:t>11/6/2018</a:t>
             </a:fld>
             <a:endParaRPr lang="en-US"/>
           </a:p>
@@ -1834,7 +1839,7 @@
           <a:p>
             <a:fld id="{4899E5CE-9E2F-4137-94E0-5AE06EE15E38}" type="datetimeFigureOut">
               <a:rPr lang="en-US" smtClean="0"/>
-              <a:t>11/5/2018</a:t>
+              <a:t>11/6/2018</a:t>
             </a:fld>
             <a:endParaRPr lang="en-US"/>
           </a:p>
@@ -2246,7 +2251,7 @@
           <a:p>
             <a:fld id="{4899E5CE-9E2F-4137-94E0-5AE06EE15E38}" type="datetimeFigureOut">
               <a:rPr lang="en-US" smtClean="0"/>
-              <a:t>11/5/2018</a:t>
+              <a:t>11/6/2018</a:t>
             </a:fld>
             <a:endParaRPr lang="en-US"/>
           </a:p>
@@ -2387,7 +2392,7 @@
           <a:p>
             <a:fld id="{4899E5CE-9E2F-4137-94E0-5AE06EE15E38}" type="datetimeFigureOut">
               <a:rPr lang="en-US" smtClean="0"/>
-              <a:t>11/5/2018</a:t>
+              <a:t>11/6/2018</a:t>
             </a:fld>
             <a:endParaRPr lang="en-US"/>
           </a:p>
@@ -2500,7 +2505,7 @@
           <a:p>
             <a:fld id="{4899E5CE-9E2F-4137-94E0-5AE06EE15E38}" type="datetimeFigureOut">
               <a:rPr lang="en-US" smtClean="0"/>
-              <a:t>11/5/2018</a:t>
+              <a:t>11/6/2018</a:t>
             </a:fld>
             <a:endParaRPr lang="en-US"/>
           </a:p>
@@ -2811,7 +2816,7 @@
           <a:p>
             <a:fld id="{4899E5CE-9E2F-4137-94E0-5AE06EE15E38}" type="datetimeFigureOut">
               <a:rPr lang="en-US" smtClean="0"/>
-              <a:t>11/5/2018</a:t>
+              <a:t>11/6/2018</a:t>
             </a:fld>
             <a:endParaRPr lang="en-US"/>
           </a:p>
@@ -3099,7 +3104,7 @@
           <a:p>
             <a:fld id="{4899E5CE-9E2F-4137-94E0-5AE06EE15E38}" type="datetimeFigureOut">
               <a:rPr lang="en-US" smtClean="0"/>
-              <a:t>11/5/2018</a:t>
+              <a:t>11/6/2018</a:t>
             </a:fld>
             <a:endParaRPr lang="en-US"/>
           </a:p>
@@ -3340,7 +3345,7 @@
           <a:p>
             <a:fld id="{4899E5CE-9E2F-4137-94E0-5AE06EE15E38}" type="datetimeFigureOut">
               <a:rPr lang="en-US" smtClean="0"/>
-              <a:t>11/5/2018</a:t>
+              <a:t>11/6/2018</a:t>
             </a:fld>
             <a:endParaRPr lang="en-US"/>
           </a:p>
@@ -3759,161 +3764,6 @@
       </p:grpSpPr>
       <p:pic>
         <p:nvPicPr>
-          <p:cNvPr id="4" name="Picture 3">
-            <a:extLst>
-              <a:ext uri="{FF2B5EF4-FFF2-40B4-BE49-F238E27FC236}">
-                <a16:creationId xmlns:a16="http://schemas.microsoft.com/office/drawing/2014/main" id="{AF2750F8-B157-457A-8354-6C9128E31405}"/>
-              </a:ext>
-            </a:extLst>
-          </p:cNvPr>
-          <p:cNvPicPr>
-            <a:picLocks noChangeAspect="1"/>
-          </p:cNvPicPr>
-          <p:nvPr/>
-        </p:nvPicPr>
-        <p:blipFill>
-          <a:blip r:embed="rId3"/>
-          <a:stretch>
-            <a:fillRect/>
-          </a:stretch>
-        </p:blipFill>
-        <p:spPr>
-          <a:xfrm>
-            <a:off x="475367" y="698270"/>
-            <a:ext cx="2735337" cy="2541616"/>
-          </a:xfrm>
-          <a:prstGeom prst="rect">
-            <a:avLst/>
-          </a:prstGeom>
-        </p:spPr>
-      </p:pic>
-      <p:sp>
-        <p:nvSpPr>
-          <p:cNvPr id="5" name="Rectangle 4">
-            <a:extLst>
-              <a:ext uri="{FF2B5EF4-FFF2-40B4-BE49-F238E27FC236}">
-                <a16:creationId xmlns:a16="http://schemas.microsoft.com/office/drawing/2014/main" id="{B40A5694-E5D6-47D0-849A-0A6E45DF74F9}"/>
-              </a:ext>
-            </a:extLst>
-          </p:cNvPr>
-          <p:cNvSpPr/>
-          <p:nvPr/>
-        </p:nvSpPr>
-        <p:spPr>
-          <a:xfrm>
-            <a:off x="573192" y="236605"/>
-            <a:ext cx="2646878" cy="461665"/>
-          </a:xfrm>
-          <a:prstGeom prst="rect">
-            <a:avLst/>
-          </a:prstGeom>
-        </p:spPr>
-        <p:txBody>
-          <a:bodyPr wrap="none">
-            <a:spAutoFit/>
-          </a:bodyPr>
-          <a:lstStyle/>
-          <a:p>
-            <a:r>
-              <a:rPr lang="en-US" sz="2400" dirty="0">
-                <a:latin typeface="Segoe UI Light" panose="020B0502040204020203" pitchFamily="34" charset="0"/>
-                <a:cs typeface="Segoe UI Light" panose="020B0502040204020203" pitchFamily="34" charset="0"/>
-              </a:rPr>
-              <a:t>Anomaly Detection</a:t>
-            </a:r>
-          </a:p>
-        </p:txBody>
-      </p:sp>
-      <p:grpSp>
-        <p:nvGrpSpPr>
-          <p:cNvPr id="8" name="Group 7">
-            <a:extLst>
-              <a:ext uri="{FF2B5EF4-FFF2-40B4-BE49-F238E27FC236}">
-                <a16:creationId xmlns:a16="http://schemas.microsoft.com/office/drawing/2014/main" id="{3C1620E0-0987-4F0D-9DF0-81FA28B3F3F0}"/>
-              </a:ext>
-            </a:extLst>
-          </p:cNvPr>
-          <p:cNvGrpSpPr/>
-          <p:nvPr/>
-        </p:nvGrpSpPr>
-        <p:grpSpPr>
-          <a:xfrm>
-            <a:off x="3997593" y="236605"/>
-            <a:ext cx="2867853" cy="3075410"/>
-            <a:chOff x="3997593" y="236605"/>
-            <a:chExt cx="2867853" cy="3075410"/>
-          </a:xfrm>
-        </p:grpSpPr>
-        <p:pic>
-          <p:nvPicPr>
-            <p:cNvPr id="6" name="Picture 5">
-              <a:extLst>
-                <a:ext uri="{FF2B5EF4-FFF2-40B4-BE49-F238E27FC236}">
-                  <a16:creationId xmlns:a16="http://schemas.microsoft.com/office/drawing/2014/main" id="{D9CD3270-8826-4DA3-AAED-0A0B4BBBE198}"/>
-                </a:ext>
-              </a:extLst>
-            </p:cNvPr>
-            <p:cNvPicPr>
-              <a:picLocks noChangeAspect="1"/>
-            </p:cNvPicPr>
-            <p:nvPr/>
-          </p:nvPicPr>
-          <p:blipFill>
-            <a:blip r:embed="rId4"/>
-            <a:stretch>
-              <a:fillRect/>
-            </a:stretch>
-          </p:blipFill>
-          <p:spPr>
-            <a:xfrm>
-              <a:off x="3997593" y="770399"/>
-              <a:ext cx="2867853" cy="2541616"/>
-            </a:xfrm>
-            <a:prstGeom prst="rect">
-              <a:avLst/>
-            </a:prstGeom>
-          </p:spPr>
-        </p:pic>
-        <p:sp>
-          <p:nvSpPr>
-            <p:cNvPr id="7" name="Rectangle 6">
-              <a:extLst>
-                <a:ext uri="{FF2B5EF4-FFF2-40B4-BE49-F238E27FC236}">
-                  <a16:creationId xmlns:a16="http://schemas.microsoft.com/office/drawing/2014/main" id="{A80C73FA-B65C-4345-B0DB-0C1D682B4021}"/>
-                </a:ext>
-              </a:extLst>
-            </p:cNvPr>
-            <p:cNvSpPr/>
-            <p:nvPr/>
-          </p:nvSpPr>
-          <p:spPr>
-            <a:xfrm>
-              <a:off x="4089114" y="236605"/>
-              <a:ext cx="2465740" cy="461665"/>
-            </a:xfrm>
-            <a:prstGeom prst="rect">
-              <a:avLst/>
-            </a:prstGeom>
-          </p:spPr>
-          <p:txBody>
-            <a:bodyPr wrap="none">
-              <a:spAutoFit/>
-            </a:bodyPr>
-            <a:lstStyle/>
-            <a:p>
-              <a:r>
-                <a:rPr lang="en-US" sz="2400" dirty="0">
-                  <a:latin typeface="Segoe UI Light" panose="020B0502040204020203" pitchFamily="34" charset="0"/>
-                  <a:cs typeface="Segoe UI Light" panose="020B0502040204020203" pitchFamily="34" charset="0"/>
-                </a:rPr>
-                <a:t>Recommendation</a:t>
-              </a:r>
-            </a:p>
-          </p:txBody>
-        </p:sp>
-      </p:grpSp>
-      <p:pic>
-        <p:nvPicPr>
           <p:cNvPr id="1028" name="Picture 4" descr="Related image">
             <a:extLst>
               <a:ext uri="{FF2B5EF4-FFF2-40B4-BE49-F238E27FC236}">
@@ -3927,11 +3777,11 @@
           <p:nvPr/>
         </p:nvPicPr>
         <p:blipFill>
-          <a:blip r:embed="rId5">
+          <a:blip r:embed="rId3">
             <a:extLst>
               <a:ext uri="{BEBA8EAE-BF5A-486C-A8C5-ECC9F3942E4B}">
                 <a14:imgProps xmlns:a14="http://schemas.microsoft.com/office/drawing/2010/main">
-                  <a14:imgLayer r:embed="rId6">
+                  <a14:imgLayer r:embed="rId4">
                     <a14:imgEffect>
                       <a14:saturation sat="200000"/>
                     </a14:imgEffect>
@@ -4020,7 +3870,7 @@
           <p:nvPr/>
         </p:nvPicPr>
         <p:blipFill>
-          <a:blip r:embed="rId7"/>
+          <a:blip r:embed="rId5"/>
           <a:stretch>
             <a:fillRect/>
           </a:stretch>
@@ -4050,7 +3900,7 @@
           <p:nvPr/>
         </p:nvPicPr>
         <p:blipFill>
-          <a:blip r:embed="rId8">
+          <a:blip r:embed="rId6">
             <a:extLst>
               <a:ext uri="{28A0092B-C50C-407E-A947-70E740481C1C}">
                 <a14:useLocalDpi xmlns:a14="http://schemas.microsoft.com/office/drawing/2010/main" val="0"/>
@@ -4097,7 +3947,7 @@
           <p:nvPr/>
         </p:nvPicPr>
         <p:blipFill>
-          <a:blip r:embed="rId9">
+          <a:blip r:embed="rId7">
             <a:extLst>
               <a:ext uri="{28A0092B-C50C-407E-A947-70E740481C1C}">
                 <a14:useLocalDpi xmlns:a14="http://schemas.microsoft.com/office/drawing/2010/main" val="0"/>
@@ -4129,6 +3979,1116 @@
           </a:extLst>
         </p:spPr>
       </p:pic>
+      <p:grpSp>
+        <p:nvGrpSpPr>
+          <p:cNvPr id="22" name="Group 21">
+            <a:extLst>
+              <a:ext uri="{FF2B5EF4-FFF2-40B4-BE49-F238E27FC236}">
+                <a16:creationId xmlns:a16="http://schemas.microsoft.com/office/drawing/2014/main" id="{958F57CB-B44B-4A53-83C6-8D33F1E4B41E}"/>
+              </a:ext>
+            </a:extLst>
+          </p:cNvPr>
+          <p:cNvGrpSpPr/>
+          <p:nvPr/>
+        </p:nvGrpSpPr>
+        <p:grpSpPr>
+          <a:xfrm>
+            <a:off x="4082438" y="571185"/>
+            <a:ext cx="2241319" cy="2281465"/>
+            <a:chOff x="8029244" y="3569308"/>
+            <a:chExt cx="2241319" cy="2281465"/>
+          </a:xfrm>
+        </p:grpSpPr>
+        <p:sp>
+          <p:nvSpPr>
+            <p:cNvPr id="3" name="Oval 2">
+              <a:extLst>
+                <a:ext uri="{FF2B5EF4-FFF2-40B4-BE49-F238E27FC236}">
+                  <a16:creationId xmlns:a16="http://schemas.microsoft.com/office/drawing/2014/main" id="{8DD0FA17-F476-4BA1-9A59-B4671AF9EC47}"/>
+                </a:ext>
+              </a:extLst>
+            </p:cNvPr>
+            <p:cNvSpPr/>
+            <p:nvPr/>
+          </p:nvSpPr>
+          <p:spPr>
+            <a:xfrm>
+              <a:off x="8221805" y="4056611"/>
+              <a:ext cx="1794162" cy="1794162"/>
+            </a:xfrm>
+            <a:prstGeom prst="ellipse">
+              <a:avLst/>
+            </a:prstGeom>
+            <a:noFill/>
+            <a:ln w="44450">
+              <a:solidFill>
+                <a:srgbClr val="289CD7"/>
+              </a:solidFill>
+            </a:ln>
+          </p:spPr>
+          <p:style>
+            <a:lnRef idx="2">
+              <a:schemeClr val="accent1">
+                <a:shade val="50000"/>
+              </a:schemeClr>
+            </a:lnRef>
+            <a:fillRef idx="1">
+              <a:schemeClr val="accent1"/>
+            </a:fillRef>
+            <a:effectRef idx="0">
+              <a:schemeClr val="accent1"/>
+            </a:effectRef>
+            <a:fontRef idx="minor">
+              <a:schemeClr val="lt1"/>
+            </a:fontRef>
+          </p:style>
+          <p:txBody>
+            <a:bodyPr rtlCol="0" anchor="ctr"/>
+            <a:lstStyle/>
+            <a:p>
+              <a:pPr algn="ctr"/>
+              <a:endParaRPr lang="en-US"/>
+            </a:p>
+          </p:txBody>
+        </p:sp>
+        <p:sp>
+          <p:nvSpPr>
+            <p:cNvPr id="21" name="Freeform: Shape 20">
+              <a:extLst>
+                <a:ext uri="{FF2B5EF4-FFF2-40B4-BE49-F238E27FC236}">
+                  <a16:creationId xmlns:a16="http://schemas.microsoft.com/office/drawing/2014/main" id="{886360A9-AB1F-4537-BAD4-0C345D429589}"/>
+                </a:ext>
+              </a:extLst>
+            </p:cNvPr>
+            <p:cNvSpPr/>
+            <p:nvPr/>
+          </p:nvSpPr>
+          <p:spPr>
+            <a:xfrm>
+              <a:off x="8241102" y="4255666"/>
+              <a:ext cx="1742536" cy="908749"/>
+            </a:xfrm>
+            <a:custGeom>
+              <a:avLst/>
+              <a:gdLst>
+                <a:gd name="connsiteX0" fmla="*/ 0 w 1742536"/>
+                <a:gd name="connsiteY0" fmla="*/ 822417 h 908749"/>
+                <a:gd name="connsiteX1" fmla="*/ 172528 w 1742536"/>
+                <a:gd name="connsiteY1" fmla="*/ 598130 h 908749"/>
+                <a:gd name="connsiteX2" fmla="*/ 345056 w 1742536"/>
+                <a:gd name="connsiteY2" fmla="*/ 730402 h 908749"/>
+                <a:gd name="connsiteX3" fmla="*/ 506083 w 1742536"/>
+                <a:gd name="connsiteY3" fmla="*/ 598130 h 908749"/>
+                <a:gd name="connsiteX4" fmla="*/ 667109 w 1742536"/>
+                <a:gd name="connsiteY4" fmla="*/ 782160 h 908749"/>
+                <a:gd name="connsiteX5" fmla="*/ 736121 w 1742536"/>
+                <a:gd name="connsiteY5" fmla="*/ 603881 h 908749"/>
+                <a:gd name="connsiteX6" fmla="*/ 810883 w 1742536"/>
+                <a:gd name="connsiteY6" fmla="*/ 891428 h 908749"/>
+                <a:gd name="connsiteX7" fmla="*/ 1035170 w 1742536"/>
+                <a:gd name="connsiteY7" fmla="*/ 32 h 908749"/>
+                <a:gd name="connsiteX8" fmla="*/ 1184694 w 1742536"/>
+                <a:gd name="connsiteY8" fmla="*/ 856923 h 908749"/>
+                <a:gd name="connsiteX9" fmla="*/ 1288211 w 1742536"/>
+                <a:gd name="connsiteY9" fmla="*/ 644138 h 908749"/>
+                <a:gd name="connsiteX10" fmla="*/ 1362973 w 1742536"/>
+                <a:gd name="connsiteY10" fmla="*/ 822417 h 908749"/>
+                <a:gd name="connsiteX11" fmla="*/ 1454989 w 1742536"/>
+                <a:gd name="connsiteY11" fmla="*/ 615383 h 908749"/>
+                <a:gd name="connsiteX12" fmla="*/ 1524000 w 1742536"/>
+                <a:gd name="connsiteY12" fmla="*/ 776409 h 908749"/>
+                <a:gd name="connsiteX13" fmla="*/ 1581509 w 1742536"/>
+                <a:gd name="connsiteY13" fmla="*/ 655640 h 908749"/>
+                <a:gd name="connsiteX14" fmla="*/ 1633268 w 1742536"/>
+                <a:gd name="connsiteY14" fmla="*/ 810915 h 908749"/>
+                <a:gd name="connsiteX15" fmla="*/ 1673524 w 1742536"/>
+                <a:gd name="connsiteY15" fmla="*/ 701647 h 908749"/>
+                <a:gd name="connsiteX16" fmla="*/ 1742536 w 1742536"/>
+                <a:gd name="connsiteY16" fmla="*/ 805164 h 908749"/>
+                <a:gd name="connsiteX17" fmla="*/ 1742536 w 1742536"/>
+                <a:gd name="connsiteY17" fmla="*/ 805164 h 908749"/>
+              </a:gdLst>
+              <a:ahLst/>
+              <a:cxnLst>
+                <a:cxn ang="0">
+                  <a:pos x="connsiteX0" y="connsiteY0"/>
+                </a:cxn>
+                <a:cxn ang="0">
+                  <a:pos x="connsiteX1" y="connsiteY1"/>
+                </a:cxn>
+                <a:cxn ang="0">
+                  <a:pos x="connsiteX2" y="connsiteY2"/>
+                </a:cxn>
+                <a:cxn ang="0">
+                  <a:pos x="connsiteX3" y="connsiteY3"/>
+                </a:cxn>
+                <a:cxn ang="0">
+                  <a:pos x="connsiteX4" y="connsiteY4"/>
+                </a:cxn>
+                <a:cxn ang="0">
+                  <a:pos x="connsiteX5" y="connsiteY5"/>
+                </a:cxn>
+                <a:cxn ang="0">
+                  <a:pos x="connsiteX6" y="connsiteY6"/>
+                </a:cxn>
+                <a:cxn ang="0">
+                  <a:pos x="connsiteX7" y="connsiteY7"/>
+                </a:cxn>
+                <a:cxn ang="0">
+                  <a:pos x="connsiteX8" y="connsiteY8"/>
+                </a:cxn>
+                <a:cxn ang="0">
+                  <a:pos x="connsiteX9" y="connsiteY9"/>
+                </a:cxn>
+                <a:cxn ang="0">
+                  <a:pos x="connsiteX10" y="connsiteY10"/>
+                </a:cxn>
+                <a:cxn ang="0">
+                  <a:pos x="connsiteX11" y="connsiteY11"/>
+                </a:cxn>
+                <a:cxn ang="0">
+                  <a:pos x="connsiteX12" y="connsiteY12"/>
+                </a:cxn>
+                <a:cxn ang="0">
+                  <a:pos x="connsiteX13" y="connsiteY13"/>
+                </a:cxn>
+                <a:cxn ang="0">
+                  <a:pos x="connsiteX14" y="connsiteY14"/>
+                </a:cxn>
+                <a:cxn ang="0">
+                  <a:pos x="connsiteX15" y="connsiteY15"/>
+                </a:cxn>
+                <a:cxn ang="0">
+                  <a:pos x="connsiteX16" y="connsiteY16"/>
+                </a:cxn>
+                <a:cxn ang="0">
+                  <a:pos x="connsiteX17" y="connsiteY17"/>
+                </a:cxn>
+              </a:cxnLst>
+              <a:rect l="l" t="t" r="r" b="b"/>
+              <a:pathLst>
+                <a:path w="1742536" h="908749">
+                  <a:moveTo>
+                    <a:pt x="0" y="822417"/>
+                  </a:moveTo>
+                  <a:cubicBezTo>
+                    <a:pt x="57509" y="717941"/>
+                    <a:pt x="115019" y="613466"/>
+                    <a:pt x="172528" y="598130"/>
+                  </a:cubicBezTo>
+                  <a:cubicBezTo>
+                    <a:pt x="230037" y="582794"/>
+                    <a:pt x="289464" y="730402"/>
+                    <a:pt x="345056" y="730402"/>
+                  </a:cubicBezTo>
+                  <a:cubicBezTo>
+                    <a:pt x="400648" y="730402"/>
+                    <a:pt x="452408" y="589504"/>
+                    <a:pt x="506083" y="598130"/>
+                  </a:cubicBezTo>
+                  <a:cubicBezTo>
+                    <a:pt x="559758" y="606756"/>
+                    <a:pt x="628769" y="781201"/>
+                    <a:pt x="667109" y="782160"/>
+                  </a:cubicBezTo>
+                  <a:cubicBezTo>
+                    <a:pt x="705449" y="783119"/>
+                    <a:pt x="712159" y="585670"/>
+                    <a:pt x="736121" y="603881"/>
+                  </a:cubicBezTo>
+                  <a:cubicBezTo>
+                    <a:pt x="760083" y="622092"/>
+                    <a:pt x="761042" y="992069"/>
+                    <a:pt x="810883" y="891428"/>
+                  </a:cubicBezTo>
+                  <a:cubicBezTo>
+                    <a:pt x="860724" y="790787"/>
+                    <a:pt x="972868" y="5783"/>
+                    <a:pt x="1035170" y="32"/>
+                  </a:cubicBezTo>
+                  <a:cubicBezTo>
+                    <a:pt x="1097472" y="-5719"/>
+                    <a:pt x="1142521" y="749572"/>
+                    <a:pt x="1184694" y="856923"/>
+                  </a:cubicBezTo>
+                  <a:cubicBezTo>
+                    <a:pt x="1226867" y="964274"/>
+                    <a:pt x="1258498" y="649889"/>
+                    <a:pt x="1288211" y="644138"/>
+                  </a:cubicBezTo>
+                  <a:cubicBezTo>
+                    <a:pt x="1317924" y="638387"/>
+                    <a:pt x="1335177" y="827209"/>
+                    <a:pt x="1362973" y="822417"/>
+                  </a:cubicBezTo>
+                  <a:cubicBezTo>
+                    <a:pt x="1390769" y="817625"/>
+                    <a:pt x="1428151" y="623051"/>
+                    <a:pt x="1454989" y="615383"/>
+                  </a:cubicBezTo>
+                  <a:cubicBezTo>
+                    <a:pt x="1481827" y="607715"/>
+                    <a:pt x="1502913" y="769699"/>
+                    <a:pt x="1524000" y="776409"/>
+                  </a:cubicBezTo>
+                  <a:cubicBezTo>
+                    <a:pt x="1545087" y="783118"/>
+                    <a:pt x="1563298" y="649889"/>
+                    <a:pt x="1581509" y="655640"/>
+                  </a:cubicBezTo>
+                  <a:cubicBezTo>
+                    <a:pt x="1599720" y="661391"/>
+                    <a:pt x="1617932" y="803247"/>
+                    <a:pt x="1633268" y="810915"/>
+                  </a:cubicBezTo>
+                  <a:cubicBezTo>
+                    <a:pt x="1648604" y="818583"/>
+                    <a:pt x="1655313" y="702605"/>
+                    <a:pt x="1673524" y="701647"/>
+                  </a:cubicBezTo>
+                  <a:cubicBezTo>
+                    <a:pt x="1691735" y="700689"/>
+                    <a:pt x="1742536" y="805164"/>
+                    <a:pt x="1742536" y="805164"/>
+                  </a:cubicBezTo>
+                  <a:lnTo>
+                    <a:pt x="1742536" y="805164"/>
+                  </a:lnTo>
+                </a:path>
+              </a:pathLst>
+            </a:custGeom>
+            <a:noFill/>
+            <a:ln w="31750">
+              <a:solidFill>
+                <a:srgbClr val="289CD7"/>
+              </a:solidFill>
+            </a:ln>
+          </p:spPr>
+          <p:style>
+            <a:lnRef idx="2">
+              <a:schemeClr val="accent1">
+                <a:shade val="50000"/>
+              </a:schemeClr>
+            </a:lnRef>
+            <a:fillRef idx="1">
+              <a:schemeClr val="accent1"/>
+            </a:fillRef>
+            <a:effectRef idx="0">
+              <a:schemeClr val="accent1"/>
+            </a:effectRef>
+            <a:fontRef idx="minor">
+              <a:schemeClr val="lt1"/>
+            </a:fontRef>
+          </p:style>
+          <p:txBody>
+            <a:bodyPr rtlCol="0" anchor="ctr"/>
+            <a:lstStyle/>
+            <a:p>
+              <a:pPr algn="ctr"/>
+              <a:endParaRPr lang="en-US"/>
+            </a:p>
+          </p:txBody>
+        </p:sp>
+        <p:pic>
+          <p:nvPicPr>
+            <p:cNvPr id="1026" name="Picture 2" descr="Image result for icon magnifying glass">
+              <a:extLst>
+                <a:ext uri="{FF2B5EF4-FFF2-40B4-BE49-F238E27FC236}">
+                  <a16:creationId xmlns:a16="http://schemas.microsoft.com/office/drawing/2014/main" id="{1429CF30-3DD4-47C4-B8A7-129435CBD4E0}"/>
+                </a:ext>
+              </a:extLst>
+            </p:cNvPr>
+            <p:cNvPicPr>
+              <a:picLocks noChangeAspect="1" noChangeArrowheads="1"/>
+            </p:cNvPicPr>
+            <p:nvPr/>
+          </p:nvPicPr>
+          <p:blipFill>
+            <a:blip r:embed="rId8">
+              <a:grayscl/>
+              <a:extLst>
+                <a:ext uri="{28A0092B-C50C-407E-A947-70E740481C1C}">
+                  <a14:useLocalDpi xmlns:a14="http://schemas.microsoft.com/office/drawing/2010/main" val="0"/>
+                </a:ext>
+              </a:extLst>
+            </a:blip>
+            <a:srcRect/>
+            <a:stretch>
+              <a:fillRect/>
+            </a:stretch>
+          </p:blipFill>
+          <p:spPr bwMode="auto">
+            <a:xfrm>
+              <a:off x="8902857" y="4056611"/>
+              <a:ext cx="983016" cy="983016"/>
+            </a:xfrm>
+            <a:prstGeom prst="rect">
+              <a:avLst/>
+            </a:prstGeom>
+            <a:noFill/>
+            <a:extLst>
+              <a:ext uri="{909E8E84-426E-40DD-AFC4-6F175D3DCCD1}">
+                <a14:hiddenFill xmlns:a14="http://schemas.microsoft.com/office/drawing/2010/main">
+                  <a:solidFill>
+                    <a:srgbClr val="FFFFFF"/>
+                  </a:solidFill>
+                </a14:hiddenFill>
+              </a:ext>
+            </a:extLst>
+          </p:spPr>
+        </p:pic>
+        <p:sp>
+          <p:nvSpPr>
+            <p:cNvPr id="26" name="Rectangle 25">
+              <a:extLst>
+                <a:ext uri="{FF2B5EF4-FFF2-40B4-BE49-F238E27FC236}">
+                  <a16:creationId xmlns:a16="http://schemas.microsoft.com/office/drawing/2014/main" id="{B7DEB47D-1536-471A-A215-8EFD23764E98}"/>
+                </a:ext>
+              </a:extLst>
+            </p:cNvPr>
+            <p:cNvSpPr/>
+            <p:nvPr/>
+          </p:nvSpPr>
+          <p:spPr>
+            <a:xfrm>
+              <a:off x="8029244" y="3569308"/>
+              <a:ext cx="2241319" cy="400110"/>
+            </a:xfrm>
+            <a:prstGeom prst="rect">
+              <a:avLst/>
+            </a:prstGeom>
+          </p:spPr>
+          <p:txBody>
+            <a:bodyPr wrap="none">
+              <a:spAutoFit/>
+            </a:bodyPr>
+            <a:lstStyle/>
+            <a:p>
+              <a:r>
+                <a:rPr lang="en-US" sz="2000" dirty="0">
+                  <a:latin typeface="Segoe UI Light" panose="020B0502040204020203" pitchFamily="34" charset="0"/>
+                  <a:cs typeface="Segoe UI Light" panose="020B0502040204020203" pitchFamily="34" charset="0"/>
+                </a:rPr>
+                <a:t>Anomaly Detection</a:t>
+              </a:r>
+            </a:p>
+          </p:txBody>
+        </p:sp>
+      </p:grpSp>
+      <p:sp>
+        <p:nvSpPr>
+          <p:cNvPr id="5" name="Rectangle 4">
+            <a:extLst>
+              <a:ext uri="{FF2B5EF4-FFF2-40B4-BE49-F238E27FC236}">
+                <a16:creationId xmlns:a16="http://schemas.microsoft.com/office/drawing/2014/main" id="{B40A5694-E5D6-47D0-849A-0A6E45DF74F9}"/>
+              </a:ext>
+            </a:extLst>
+          </p:cNvPr>
+          <p:cNvSpPr/>
+          <p:nvPr/>
+        </p:nvSpPr>
+        <p:spPr>
+          <a:xfrm>
+            <a:off x="746595" y="550657"/>
+            <a:ext cx="2884123" cy="507831"/>
+          </a:xfrm>
+          <a:prstGeom prst="rect">
+            <a:avLst/>
+          </a:prstGeom>
+        </p:spPr>
+        <p:txBody>
+          <a:bodyPr wrap="none">
+            <a:spAutoFit/>
+          </a:bodyPr>
+          <a:lstStyle/>
+          <a:p>
+            <a:r>
+              <a:rPr lang="en-US" sz="2700" dirty="0">
+                <a:latin typeface="Segoe UI Light" panose="020B0502040204020203" pitchFamily="34" charset="0"/>
+                <a:cs typeface="Segoe UI Light" panose="020B0502040204020203" pitchFamily="34" charset="0"/>
+              </a:rPr>
+              <a:t>Recommendations</a:t>
+            </a:r>
+          </a:p>
+        </p:txBody>
+      </p:sp>
+      <p:grpSp>
+        <p:nvGrpSpPr>
+          <p:cNvPr id="58" name="Group 57">
+            <a:extLst>
+              <a:ext uri="{FF2B5EF4-FFF2-40B4-BE49-F238E27FC236}">
+                <a16:creationId xmlns:a16="http://schemas.microsoft.com/office/drawing/2014/main" id="{FE1F3DC9-91C3-4726-A2A0-4A86D4B08678}"/>
+              </a:ext>
+            </a:extLst>
+          </p:cNvPr>
+          <p:cNvGrpSpPr/>
+          <p:nvPr/>
+        </p:nvGrpSpPr>
+        <p:grpSpPr>
+          <a:xfrm>
+            <a:off x="7518303" y="4529135"/>
+            <a:ext cx="2884123" cy="1992831"/>
+            <a:chOff x="765892" y="623885"/>
+            <a:chExt cx="2884123" cy="1992831"/>
+          </a:xfrm>
+        </p:grpSpPr>
+        <p:sp>
+          <p:nvSpPr>
+            <p:cNvPr id="59" name="Rectangle 58">
+              <a:extLst>
+                <a:ext uri="{FF2B5EF4-FFF2-40B4-BE49-F238E27FC236}">
+                  <a16:creationId xmlns:a16="http://schemas.microsoft.com/office/drawing/2014/main" id="{3730CB43-1636-49FC-A926-E9E23E761577}"/>
+                </a:ext>
+              </a:extLst>
+            </p:cNvPr>
+            <p:cNvSpPr/>
+            <p:nvPr/>
+          </p:nvSpPr>
+          <p:spPr>
+            <a:xfrm>
+              <a:off x="765892" y="623885"/>
+              <a:ext cx="2884123" cy="507831"/>
+            </a:xfrm>
+            <a:prstGeom prst="rect">
+              <a:avLst/>
+            </a:prstGeom>
+          </p:spPr>
+          <p:txBody>
+            <a:bodyPr wrap="none">
+              <a:spAutoFit/>
+            </a:bodyPr>
+            <a:lstStyle/>
+            <a:p>
+              <a:r>
+                <a:rPr lang="en-US" sz="2700" dirty="0">
+                  <a:latin typeface="Segoe UI Light" panose="020B0502040204020203" pitchFamily="34" charset="0"/>
+                  <a:cs typeface="Segoe UI Light" panose="020B0502040204020203" pitchFamily="34" charset="0"/>
+                </a:rPr>
+                <a:t>Recommendations</a:t>
+              </a:r>
+            </a:p>
+          </p:txBody>
+        </p:sp>
+        <p:sp>
+          <p:nvSpPr>
+            <p:cNvPr id="60" name="Oval 59">
+              <a:extLst>
+                <a:ext uri="{FF2B5EF4-FFF2-40B4-BE49-F238E27FC236}">
+                  <a16:creationId xmlns:a16="http://schemas.microsoft.com/office/drawing/2014/main" id="{76FF9761-C1A6-4AFF-8B4B-68DFB78856BF}"/>
+                </a:ext>
+              </a:extLst>
+            </p:cNvPr>
+            <p:cNvSpPr>
+              <a:spLocks noChangeAspect="1"/>
+            </p:cNvSpPr>
+            <p:nvPr/>
+          </p:nvSpPr>
+          <p:spPr>
+            <a:xfrm>
+              <a:off x="771326" y="1336556"/>
+              <a:ext cx="1280160" cy="1280160"/>
+            </a:xfrm>
+            <a:prstGeom prst="ellipse">
+              <a:avLst/>
+            </a:prstGeom>
+            <a:solidFill>
+              <a:srgbClr val="1C9CD8"/>
+            </a:solidFill>
+            <a:ln>
+              <a:noFill/>
+            </a:ln>
+          </p:spPr>
+          <p:style>
+            <a:lnRef idx="2">
+              <a:schemeClr val="accent1">
+                <a:shade val="50000"/>
+              </a:schemeClr>
+            </a:lnRef>
+            <a:fillRef idx="1">
+              <a:schemeClr val="accent1"/>
+            </a:fillRef>
+            <a:effectRef idx="0">
+              <a:schemeClr val="accent1"/>
+            </a:effectRef>
+            <a:fontRef idx="minor">
+              <a:schemeClr val="lt1"/>
+            </a:fontRef>
+          </p:style>
+          <p:txBody>
+            <a:bodyPr rtlCol="0" anchor="ctr"/>
+            <a:lstStyle/>
+            <a:p>
+              <a:pPr algn="ctr"/>
+              <a:endParaRPr lang="en-US"/>
+            </a:p>
+          </p:txBody>
+        </p:sp>
+        <p:grpSp>
+          <p:nvGrpSpPr>
+            <p:cNvPr id="61" name="Group 60">
+              <a:extLst>
+                <a:ext uri="{FF2B5EF4-FFF2-40B4-BE49-F238E27FC236}">
+                  <a16:creationId xmlns:a16="http://schemas.microsoft.com/office/drawing/2014/main" id="{CC1FA5D7-F21F-44A6-A888-1EFE6EC3E293}"/>
+                </a:ext>
+              </a:extLst>
+            </p:cNvPr>
+            <p:cNvGrpSpPr/>
+            <p:nvPr/>
+          </p:nvGrpSpPr>
+          <p:grpSpPr>
+            <a:xfrm>
+              <a:off x="2286700" y="1317504"/>
+              <a:ext cx="1280160" cy="1280160"/>
+              <a:chOff x="9537939" y="4451230"/>
+              <a:chExt cx="1280160" cy="1280160"/>
+            </a:xfrm>
+          </p:grpSpPr>
+          <p:sp>
+            <p:nvSpPr>
+              <p:cNvPr id="64" name="Oval 63">
+                <a:extLst>
+                  <a:ext uri="{FF2B5EF4-FFF2-40B4-BE49-F238E27FC236}">
+                    <a16:creationId xmlns:a16="http://schemas.microsoft.com/office/drawing/2014/main" id="{A5CB243B-816A-4BFB-B8F5-6983721CDC64}"/>
+                  </a:ext>
+                </a:extLst>
+              </p:cNvPr>
+              <p:cNvSpPr>
+                <a:spLocks noChangeAspect="1"/>
+              </p:cNvSpPr>
+              <p:nvPr/>
+            </p:nvSpPr>
+            <p:spPr>
+              <a:xfrm>
+                <a:off x="9537939" y="4451230"/>
+                <a:ext cx="1280160" cy="1280160"/>
+              </a:xfrm>
+              <a:prstGeom prst="ellipse">
+                <a:avLst/>
+              </a:prstGeom>
+              <a:solidFill>
+                <a:srgbClr val="1C9CD8"/>
+              </a:solidFill>
+              <a:ln>
+                <a:noFill/>
+              </a:ln>
+            </p:spPr>
+            <p:style>
+              <a:lnRef idx="2">
+                <a:schemeClr val="accent1">
+                  <a:shade val="50000"/>
+                </a:schemeClr>
+              </a:lnRef>
+              <a:fillRef idx="1">
+                <a:schemeClr val="accent1"/>
+              </a:fillRef>
+              <a:effectRef idx="0">
+                <a:schemeClr val="accent1"/>
+              </a:effectRef>
+              <a:fontRef idx="minor">
+                <a:schemeClr val="lt1"/>
+              </a:fontRef>
+            </p:style>
+            <p:txBody>
+              <a:bodyPr rtlCol="0" anchor="ctr"/>
+              <a:lstStyle/>
+              <a:p>
+                <a:pPr algn="ctr"/>
+                <a:endParaRPr lang="en-US"/>
+              </a:p>
+            </p:txBody>
+          </p:sp>
+          <p:cxnSp>
+            <p:nvCxnSpPr>
+              <p:cNvPr id="65" name="Straight Connector 64">
+                <a:extLst>
+                  <a:ext uri="{FF2B5EF4-FFF2-40B4-BE49-F238E27FC236}">
+                    <a16:creationId xmlns:a16="http://schemas.microsoft.com/office/drawing/2014/main" id="{E06134D9-2CBF-469F-A050-4F3F973CB99A}"/>
+                  </a:ext>
+                </a:extLst>
+              </p:cNvPr>
+              <p:cNvCxnSpPr>
+                <a:cxnSpLocks/>
+              </p:cNvCxnSpPr>
+              <p:nvPr/>
+            </p:nvCxnSpPr>
+            <p:spPr>
+              <a:xfrm>
+                <a:off x="9890326" y="4997570"/>
+                <a:ext cx="249843" cy="368061"/>
+              </a:xfrm>
+              <a:prstGeom prst="line">
+                <a:avLst/>
+              </a:prstGeom>
+              <a:ln w="190500">
+                <a:solidFill>
+                  <a:schemeClr val="bg1"/>
+                </a:solidFill>
+              </a:ln>
+            </p:spPr>
+            <p:style>
+              <a:lnRef idx="1">
+                <a:schemeClr val="accent1"/>
+              </a:lnRef>
+              <a:fillRef idx="0">
+                <a:schemeClr val="accent1"/>
+              </a:fillRef>
+              <a:effectRef idx="0">
+                <a:schemeClr val="accent1"/>
+              </a:effectRef>
+              <a:fontRef idx="minor">
+                <a:schemeClr val="tx1"/>
+              </a:fontRef>
+            </p:style>
+          </p:cxnSp>
+          <p:cxnSp>
+            <p:nvCxnSpPr>
+              <p:cNvPr id="66" name="Straight Connector 65">
+                <a:extLst>
+                  <a:ext uri="{FF2B5EF4-FFF2-40B4-BE49-F238E27FC236}">
+                    <a16:creationId xmlns:a16="http://schemas.microsoft.com/office/drawing/2014/main" id="{796D4935-F18F-4808-9A95-EA436C4237D9}"/>
+                  </a:ext>
+                </a:extLst>
+              </p:cNvPr>
+              <p:cNvCxnSpPr>
+                <a:cxnSpLocks/>
+              </p:cNvCxnSpPr>
+              <p:nvPr/>
+            </p:nvCxnSpPr>
+            <p:spPr>
+              <a:xfrm flipH="1">
+                <a:off x="10066014" y="4790981"/>
+                <a:ext cx="436259" cy="579177"/>
+              </a:xfrm>
+              <a:prstGeom prst="line">
+                <a:avLst/>
+              </a:prstGeom>
+              <a:ln w="190500">
+                <a:solidFill>
+                  <a:schemeClr val="bg1"/>
+                </a:solidFill>
+              </a:ln>
+            </p:spPr>
+            <p:style>
+              <a:lnRef idx="1">
+                <a:schemeClr val="accent1"/>
+              </a:lnRef>
+              <a:fillRef idx="0">
+                <a:schemeClr val="accent1"/>
+              </a:fillRef>
+              <a:effectRef idx="0">
+                <a:schemeClr val="accent1"/>
+              </a:effectRef>
+              <a:fontRef idx="minor">
+                <a:schemeClr val="tx1"/>
+              </a:fontRef>
+            </p:style>
+          </p:cxnSp>
+          <p:sp>
+            <p:nvSpPr>
+              <p:cNvPr id="67" name="Right Triangle 66">
+                <a:extLst>
+                  <a:ext uri="{FF2B5EF4-FFF2-40B4-BE49-F238E27FC236}">
+                    <a16:creationId xmlns:a16="http://schemas.microsoft.com/office/drawing/2014/main" id="{C62DFFE6-3D80-4B14-B3B4-31224F58BCF9}"/>
+                  </a:ext>
+                </a:extLst>
+              </p:cNvPr>
+              <p:cNvSpPr/>
+              <p:nvPr/>
+            </p:nvSpPr>
+            <p:spPr>
+              <a:xfrm rot="19218699">
+                <a:off x="10071524" y="5389623"/>
+                <a:ext cx="58414" cy="61387"/>
+              </a:xfrm>
+              <a:prstGeom prst="rtTriangle">
+                <a:avLst/>
+              </a:prstGeom>
+              <a:solidFill>
+                <a:schemeClr val="bg1"/>
+              </a:solidFill>
+              <a:ln>
+                <a:noFill/>
+              </a:ln>
+            </p:spPr>
+            <p:style>
+              <a:lnRef idx="2">
+                <a:schemeClr val="accent1">
+                  <a:shade val="50000"/>
+                </a:schemeClr>
+              </a:lnRef>
+              <a:fillRef idx="1">
+                <a:schemeClr val="accent1"/>
+              </a:fillRef>
+              <a:effectRef idx="0">
+                <a:schemeClr val="accent1"/>
+              </a:effectRef>
+              <a:fontRef idx="minor">
+                <a:schemeClr val="lt1"/>
+              </a:fontRef>
+            </p:style>
+            <p:txBody>
+              <a:bodyPr rtlCol="0" anchor="ctr"/>
+              <a:lstStyle/>
+              <a:p>
+                <a:pPr algn="ctr"/>
+                <a:endParaRPr lang="en-US"/>
+              </a:p>
+            </p:txBody>
+          </p:sp>
+          <p:sp>
+            <p:nvSpPr>
+              <p:cNvPr id="68" name="Right Triangle 67">
+                <a:extLst>
+                  <a:ext uri="{FF2B5EF4-FFF2-40B4-BE49-F238E27FC236}">
+                    <a16:creationId xmlns:a16="http://schemas.microsoft.com/office/drawing/2014/main" id="{33DC62F8-B9B5-42F5-B9F9-CC5F28425EB1}"/>
+                  </a:ext>
+                </a:extLst>
+              </p:cNvPr>
+              <p:cNvSpPr/>
+              <p:nvPr/>
+            </p:nvSpPr>
+            <p:spPr>
+              <a:xfrm rot="18647173">
+                <a:off x="10062149" y="5352574"/>
+                <a:ext cx="92266" cy="79276"/>
+              </a:xfrm>
+              <a:prstGeom prst="rtTriangle">
+                <a:avLst/>
+              </a:prstGeom>
+              <a:solidFill>
+                <a:schemeClr val="bg1"/>
+              </a:solidFill>
+              <a:ln>
+                <a:noFill/>
+              </a:ln>
+            </p:spPr>
+            <p:style>
+              <a:lnRef idx="2">
+                <a:schemeClr val="accent1">
+                  <a:shade val="50000"/>
+                </a:schemeClr>
+              </a:lnRef>
+              <a:fillRef idx="1">
+                <a:schemeClr val="accent1"/>
+              </a:fillRef>
+              <a:effectRef idx="0">
+                <a:schemeClr val="accent1"/>
+              </a:effectRef>
+              <a:fontRef idx="minor">
+                <a:schemeClr val="lt1"/>
+              </a:fontRef>
+            </p:style>
+            <p:txBody>
+              <a:bodyPr rtlCol="0" anchor="ctr"/>
+              <a:lstStyle/>
+              <a:p>
+                <a:pPr algn="ctr"/>
+                <a:endParaRPr lang="en-US"/>
+              </a:p>
+            </p:txBody>
+          </p:sp>
+        </p:grpSp>
+        <p:cxnSp>
+          <p:nvCxnSpPr>
+            <p:cNvPr id="62" name="Straight Connector 61">
+              <a:extLst>
+                <a:ext uri="{FF2B5EF4-FFF2-40B4-BE49-F238E27FC236}">
+                  <a16:creationId xmlns:a16="http://schemas.microsoft.com/office/drawing/2014/main" id="{D0936E4F-2D3D-4965-8ABE-0409A2C58545}"/>
+                </a:ext>
+              </a:extLst>
+            </p:cNvPr>
+            <p:cNvCxnSpPr>
+              <a:cxnSpLocks/>
+            </p:cNvCxnSpPr>
+            <p:nvPr/>
+          </p:nvCxnSpPr>
+          <p:spPr>
+            <a:xfrm flipH="1">
+              <a:off x="1145049" y="1682696"/>
+              <a:ext cx="535159" cy="591907"/>
+            </a:xfrm>
+            <a:prstGeom prst="line">
+              <a:avLst/>
+            </a:prstGeom>
+            <a:ln w="190500">
+              <a:solidFill>
+                <a:schemeClr val="bg1"/>
+              </a:solidFill>
+            </a:ln>
+          </p:spPr>
+          <p:style>
+            <a:lnRef idx="1">
+              <a:schemeClr val="accent1"/>
+            </a:lnRef>
+            <a:fillRef idx="0">
+              <a:schemeClr val="accent1"/>
+            </a:fillRef>
+            <a:effectRef idx="0">
+              <a:schemeClr val="accent1"/>
+            </a:effectRef>
+            <a:fontRef idx="minor">
+              <a:schemeClr val="tx1"/>
+            </a:fontRef>
+          </p:style>
+        </p:cxnSp>
+        <p:cxnSp>
+          <p:nvCxnSpPr>
+            <p:cNvPr id="63" name="Straight Connector 62">
+              <a:extLst>
+                <a:ext uri="{FF2B5EF4-FFF2-40B4-BE49-F238E27FC236}">
+                  <a16:creationId xmlns:a16="http://schemas.microsoft.com/office/drawing/2014/main" id="{06689D9B-3709-442D-A9E4-4D2B15E69426}"/>
+                </a:ext>
+              </a:extLst>
+            </p:cNvPr>
+            <p:cNvCxnSpPr>
+              <a:cxnSpLocks/>
+            </p:cNvCxnSpPr>
+            <p:nvPr/>
+          </p:nvCxnSpPr>
+          <p:spPr>
+            <a:xfrm flipH="1" flipV="1">
+              <a:off x="1145049" y="1682696"/>
+              <a:ext cx="535160" cy="579494"/>
+            </a:xfrm>
+            <a:prstGeom prst="line">
+              <a:avLst/>
+            </a:prstGeom>
+            <a:ln w="190500">
+              <a:solidFill>
+                <a:schemeClr val="bg1"/>
+              </a:solidFill>
+            </a:ln>
+          </p:spPr>
+          <p:style>
+            <a:lnRef idx="1">
+              <a:schemeClr val="accent1"/>
+            </a:lnRef>
+            <a:fillRef idx="0">
+              <a:schemeClr val="accent1"/>
+            </a:fillRef>
+            <a:effectRef idx="0">
+              <a:schemeClr val="accent1"/>
+            </a:effectRef>
+            <a:fontRef idx="minor">
+              <a:schemeClr val="tx1"/>
+            </a:fontRef>
+          </p:style>
+        </p:cxnSp>
+      </p:grpSp>
+      <p:sp>
+        <p:nvSpPr>
+          <p:cNvPr id="52" name="Star: 5 Points 51">
+            <a:extLst>
+              <a:ext uri="{FF2B5EF4-FFF2-40B4-BE49-F238E27FC236}">
+                <a16:creationId xmlns:a16="http://schemas.microsoft.com/office/drawing/2014/main" id="{41D77F23-62BF-47CE-80B9-BEAF57430ABA}"/>
+              </a:ext>
+            </a:extLst>
+          </p:cNvPr>
+          <p:cNvSpPr/>
+          <p:nvPr/>
+        </p:nvSpPr>
+        <p:spPr>
+          <a:xfrm>
+            <a:off x="1541607" y="1257543"/>
+            <a:ext cx="581025" cy="564554"/>
+          </a:xfrm>
+          <a:prstGeom prst="star5">
+            <a:avLst/>
+          </a:prstGeom>
+          <a:solidFill>
+            <a:srgbClr val="1C9CD8"/>
+          </a:solidFill>
+          <a:ln w="28575">
+            <a:solidFill>
+              <a:srgbClr val="1C9CD8"/>
+            </a:solidFill>
+          </a:ln>
+        </p:spPr>
+        <p:style>
+          <a:lnRef idx="2">
+            <a:schemeClr val="accent1">
+              <a:shade val="50000"/>
+            </a:schemeClr>
+          </a:lnRef>
+          <a:fillRef idx="1">
+            <a:schemeClr val="accent1"/>
+          </a:fillRef>
+          <a:effectRef idx="0">
+            <a:schemeClr val="accent1"/>
+          </a:effectRef>
+          <a:fontRef idx="minor">
+            <a:schemeClr val="lt1"/>
+          </a:fontRef>
+        </p:style>
+        <p:txBody>
+          <a:bodyPr rtlCol="0" anchor="ctr"/>
+          <a:lstStyle/>
+          <a:p>
+            <a:pPr algn="ctr"/>
+            <a:endParaRPr lang="en-US"/>
+          </a:p>
+        </p:txBody>
+      </p:sp>
+      <p:sp>
+        <p:nvSpPr>
+          <p:cNvPr id="70" name="Star: 5 Points 69">
+            <a:extLst>
+              <a:ext uri="{FF2B5EF4-FFF2-40B4-BE49-F238E27FC236}">
+                <a16:creationId xmlns:a16="http://schemas.microsoft.com/office/drawing/2014/main" id="{1509E41D-386D-4F7A-A705-5803152049B3}"/>
+              </a:ext>
+            </a:extLst>
+          </p:cNvPr>
+          <p:cNvSpPr/>
+          <p:nvPr/>
+        </p:nvSpPr>
+        <p:spPr>
+          <a:xfrm>
+            <a:off x="2246474" y="1257543"/>
+            <a:ext cx="581025" cy="564554"/>
+          </a:xfrm>
+          <a:prstGeom prst="star5">
+            <a:avLst/>
+          </a:prstGeom>
+          <a:solidFill>
+            <a:srgbClr val="1C9CD8"/>
+          </a:solidFill>
+          <a:ln w="28575">
+            <a:solidFill>
+              <a:srgbClr val="1C9CD8"/>
+            </a:solidFill>
+          </a:ln>
+        </p:spPr>
+        <p:style>
+          <a:lnRef idx="2">
+            <a:schemeClr val="accent1">
+              <a:shade val="50000"/>
+            </a:schemeClr>
+          </a:lnRef>
+          <a:fillRef idx="1">
+            <a:schemeClr val="accent1"/>
+          </a:fillRef>
+          <a:effectRef idx="0">
+            <a:schemeClr val="accent1"/>
+          </a:effectRef>
+          <a:fontRef idx="minor">
+            <a:schemeClr val="lt1"/>
+          </a:fontRef>
+        </p:style>
+        <p:txBody>
+          <a:bodyPr rtlCol="0" anchor="ctr"/>
+          <a:lstStyle/>
+          <a:p>
+            <a:pPr algn="ctr"/>
+            <a:endParaRPr lang="en-US"/>
+          </a:p>
+        </p:txBody>
+      </p:sp>
+      <p:sp>
+        <p:nvSpPr>
+          <p:cNvPr id="71" name="Star: 5 Points 70">
+            <a:extLst>
+              <a:ext uri="{FF2B5EF4-FFF2-40B4-BE49-F238E27FC236}">
+                <a16:creationId xmlns:a16="http://schemas.microsoft.com/office/drawing/2014/main" id="{C3CAD0C9-08AA-4B4B-AE49-4539578D91A2}"/>
+              </a:ext>
+            </a:extLst>
+          </p:cNvPr>
+          <p:cNvSpPr/>
+          <p:nvPr/>
+        </p:nvSpPr>
+        <p:spPr>
+          <a:xfrm>
+            <a:off x="2932044" y="1257543"/>
+            <a:ext cx="581025" cy="564554"/>
+          </a:xfrm>
+          <a:prstGeom prst="star5">
+            <a:avLst/>
+          </a:prstGeom>
+          <a:noFill/>
+          <a:ln w="28575">
+            <a:solidFill>
+              <a:srgbClr val="1C9CD8"/>
+            </a:solidFill>
+          </a:ln>
+        </p:spPr>
+        <p:style>
+          <a:lnRef idx="2">
+            <a:schemeClr val="accent1">
+              <a:shade val="50000"/>
+            </a:schemeClr>
+          </a:lnRef>
+          <a:fillRef idx="1">
+            <a:schemeClr val="accent1"/>
+          </a:fillRef>
+          <a:effectRef idx="0">
+            <a:schemeClr val="accent1"/>
+          </a:effectRef>
+          <a:fontRef idx="minor">
+            <a:schemeClr val="lt1"/>
+          </a:fontRef>
+        </p:style>
+        <p:txBody>
+          <a:bodyPr rtlCol="0" anchor="ctr"/>
+          <a:lstStyle/>
+          <a:p>
+            <a:pPr algn="ctr"/>
+            <a:endParaRPr lang="en-US"/>
+          </a:p>
+        </p:txBody>
+      </p:sp>
+      <p:sp>
+        <p:nvSpPr>
+          <p:cNvPr id="72" name="Star: 5 Points 71">
+            <a:extLst>
+              <a:ext uri="{FF2B5EF4-FFF2-40B4-BE49-F238E27FC236}">
+                <a16:creationId xmlns:a16="http://schemas.microsoft.com/office/drawing/2014/main" id="{5486CAEC-5FC3-4BC9-A9B1-9D24D21F9D46}"/>
+              </a:ext>
+            </a:extLst>
+          </p:cNvPr>
+          <p:cNvSpPr/>
+          <p:nvPr/>
+        </p:nvSpPr>
+        <p:spPr>
+          <a:xfrm>
+            <a:off x="822726" y="1257543"/>
+            <a:ext cx="581025" cy="564554"/>
+          </a:xfrm>
+          <a:prstGeom prst="star5">
+            <a:avLst/>
+          </a:prstGeom>
+          <a:solidFill>
+            <a:srgbClr val="1C9CD8"/>
+          </a:solidFill>
+          <a:ln w="28575">
+            <a:solidFill>
+              <a:srgbClr val="1C9CD8"/>
+            </a:solidFill>
+          </a:ln>
+        </p:spPr>
+        <p:style>
+          <a:lnRef idx="2">
+            <a:schemeClr val="accent1">
+              <a:shade val="50000"/>
+            </a:schemeClr>
+          </a:lnRef>
+          <a:fillRef idx="1">
+            <a:schemeClr val="accent1"/>
+          </a:fillRef>
+          <a:effectRef idx="0">
+            <a:schemeClr val="accent1"/>
+          </a:effectRef>
+          <a:fontRef idx="minor">
+            <a:schemeClr val="lt1"/>
+          </a:fontRef>
+        </p:style>
+        <p:txBody>
+          <a:bodyPr rtlCol="0" anchor="ctr"/>
+          <a:lstStyle/>
+          <a:p>
+            <a:pPr algn="ctr"/>
+            <a:endParaRPr lang="en-US"/>
+          </a:p>
+        </p:txBody>
+      </p:sp>
     </p:spTree>
     <p:extLst>
       <p:ext uri="{BB962C8B-B14F-4D97-AF65-F5344CB8AC3E}">
